--- a/LabBook_10.pptx
+++ b/LabBook_10.pptx
@@ -152,8 +152,7 @@
 <file path=ppt/revisionInfo.xml><?xml version="1.0" encoding="utf-8"?>
 <p1510:revInfo xmlns:a="http://schemas.openxmlformats.org/drawingml/2006/main" xmlns:r="http://schemas.openxmlformats.org/officeDocument/2006/relationships" xmlns:p1510="http://schemas.microsoft.com/office/powerpoint/2015/10/main">
   <p1510:revLst>
-    <p1510:client id="{4AD4F43F-1257-97E9-F6B9-AAA381845A14}" v="3598" dt="2026-03-12T18:15:47.332"/>
-    <p1510:client id="{9B9D37D3-5D6F-5858-4C8C-126081234AC6}" v="10" dt="2026-03-13T07:54:35.227"/>
+    <p1510:client id="{16873159-5BFE-2197-1040-DB3EEAF46CCE}" v="23" dt="2026-03-15T21:13:12.059"/>
   </p1510:revLst>
 </p1510:revInfo>
 </file>
@@ -252,7 +251,7 @@
           <a:p>
             <a:fld id="{8438F8DC-35B0-48E6-A86E-42F1F08DD00F}" type="datetimeFigureOut">
               <a:rPr lang="es-ES" smtClean="0"/>
-              <a:t>14/03/2026</a:t>
+              <a:t>15/03/2026</a:t>
             </a:fld>
             <a:endParaRPr lang="es-ES"/>
           </a:p>
@@ -429,7 +428,7 @@
           <a:p>
             <a:fld id="{FACBDC12-F39B-4B97-8F4D-6734F9D366FF}" type="datetimeFigureOut">
               <a:rPr lang="es-ES" smtClean="0"/>
-              <a:t>14/03/2026</a:t>
+              <a:t>15/03/2026</a:t>
             </a:fld>
             <a:endParaRPr lang="es-ES"/>
           </a:p>
@@ -7536,7 +7535,7 @@
         <p:spPr>
           <a:xfrm>
             <a:off x="609441" y="4860334"/>
-            <a:ext cx="11199971" cy="1785104"/>
+            <a:ext cx="11199971" cy="1169551"/>
           </a:xfrm>
           <a:prstGeom prst="rect">
             <a:avLst/>
@@ -8652,275 +8651,13 @@
               <a:t>alrededor</a:t>
             </a:r>
             <a:r>
-              <a:rPr lang="en-US" sz="1400" dirty="0">
+              <a:rPr lang="en-US" sz="1400">
                 <a:ea typeface="+mn-lt"/>
                 <a:cs typeface="+mn-lt"/>
               </a:rPr>
               <a:t> de 1.6145.</a:t>
             </a:r>
-            <a:endParaRPr lang="en-US" sz="1200" dirty="0">
-              <a:ea typeface="Calibri"/>
-              <a:cs typeface="Calibri"/>
-            </a:endParaRPr>
-          </a:p>
-          <a:p>
-            <a:pPr algn="just"/>
-            <a:endParaRPr lang="en-US" sz="1400" dirty="0">
-              <a:ea typeface="Calibri"/>
-              <a:cs typeface="Calibri"/>
-            </a:endParaRPr>
-          </a:p>
-          <a:p>
-            <a:pPr algn="just"/>
-            <a:r>
-              <a:rPr lang="en-US" sz="1400" dirty="0">
-                <a:ea typeface="Calibri"/>
-                <a:cs typeface="Calibri"/>
-              </a:rPr>
-              <a:t>En </a:t>
-            </a:r>
-            <a:r>
-              <a:rPr lang="en-US" sz="1400" dirty="0" err="1">
-                <a:ea typeface="Calibri"/>
-                <a:cs typeface="Calibri"/>
-              </a:rPr>
-              <a:t>cuanto</a:t>
-            </a:r>
-            <a:r>
-              <a:rPr lang="en-US" sz="1400" dirty="0">
-                <a:ea typeface="Calibri"/>
-                <a:cs typeface="Calibri"/>
-              </a:rPr>
-              <a:t> al </a:t>
-            </a:r>
-            <a:r>
-              <a:rPr lang="en-US" sz="1400" dirty="0" err="1">
-                <a:ea typeface="Calibri"/>
-                <a:cs typeface="Calibri"/>
-              </a:rPr>
-              <a:t>salto</a:t>
-            </a:r>
-            <a:r>
-              <a:rPr lang="en-US" sz="1400" dirty="0">
-                <a:ea typeface="Calibri"/>
-                <a:cs typeface="Calibri"/>
-              </a:rPr>
-              <a:t> </a:t>
-            </a:r>
-            <a:r>
-              <a:rPr lang="en-US" sz="1400" dirty="0" err="1">
-                <a:ea typeface="Calibri"/>
-                <a:cs typeface="Calibri"/>
-              </a:rPr>
-              <a:t>que</a:t>
-            </a:r>
-            <a:r>
-              <a:rPr lang="en-US" sz="1400" dirty="0">
-                <a:ea typeface="Calibri"/>
-                <a:cs typeface="Calibri"/>
-              </a:rPr>
-              <a:t> </a:t>
-            </a:r>
-            <a:r>
-              <a:rPr lang="en-US" sz="1400" dirty="0" err="1">
-                <a:ea typeface="Calibri"/>
-                <a:cs typeface="Calibri"/>
-              </a:rPr>
-              <a:t>vemos</a:t>
-            </a:r>
-            <a:r>
-              <a:rPr lang="en-US" sz="1400" dirty="0">
-                <a:ea typeface="Calibri"/>
-                <a:cs typeface="Calibri"/>
-              </a:rPr>
-              <a:t> </a:t>
-            </a:r>
-            <a:r>
-              <a:rPr lang="en-US" sz="1400" dirty="0" err="1">
-                <a:ea typeface="Calibri"/>
-                <a:cs typeface="Calibri"/>
-              </a:rPr>
-              <a:t>en</a:t>
-            </a:r>
-            <a:r>
-              <a:rPr lang="en-US" sz="1400" dirty="0">
-                <a:ea typeface="Calibri"/>
-                <a:cs typeface="Calibri"/>
-              </a:rPr>
-              <a:t> 140 um, no es </a:t>
-            </a:r>
-            <a:r>
-              <a:rPr lang="en-US" sz="1400" dirty="0" err="1">
-                <a:ea typeface="Calibri"/>
-                <a:cs typeface="Calibri"/>
-              </a:rPr>
-              <a:t>relevante</a:t>
-            </a:r>
-            <a:r>
-              <a:rPr lang="en-US" sz="1400" dirty="0">
-                <a:ea typeface="Calibri"/>
-                <a:cs typeface="Calibri"/>
-              </a:rPr>
-              <a:t>, y </a:t>
-            </a:r>
-            <a:r>
-              <a:rPr lang="en-US" sz="1400" dirty="0" err="1">
-                <a:ea typeface="Calibri"/>
-                <a:cs typeface="Calibri"/>
-              </a:rPr>
-              <a:t>como</a:t>
-            </a:r>
-            <a:r>
-              <a:rPr lang="en-US" sz="1400" dirty="0">
-                <a:ea typeface="Calibri"/>
-                <a:cs typeface="Calibri"/>
-              </a:rPr>
-              <a:t> se </a:t>
-            </a:r>
-            <a:r>
-              <a:rPr lang="en-US" sz="1400" dirty="0" err="1">
-                <a:ea typeface="Calibri"/>
-                <a:cs typeface="Calibri"/>
-              </a:rPr>
-              <a:t>comentó</a:t>
-            </a:r>
-            <a:r>
-              <a:rPr lang="en-US" sz="1400" dirty="0">
-                <a:ea typeface="Calibri"/>
-                <a:cs typeface="Calibri"/>
-              </a:rPr>
-              <a:t> </a:t>
-            </a:r>
-            <a:r>
-              <a:rPr lang="en-US" sz="1400" dirty="0" err="1">
-                <a:ea typeface="Calibri"/>
-                <a:cs typeface="Calibri"/>
-              </a:rPr>
-              <a:t>en</a:t>
-            </a:r>
-            <a:r>
-              <a:rPr lang="en-US" sz="1400" dirty="0">
-                <a:ea typeface="Calibri"/>
-                <a:cs typeface="Calibri"/>
-              </a:rPr>
-              <a:t> </a:t>
-            </a:r>
-            <a:r>
-              <a:rPr lang="en-US" sz="1400" dirty="0" err="1">
-                <a:ea typeface="Calibri"/>
-                <a:cs typeface="Calibri"/>
-              </a:rPr>
-              <a:t>clase</a:t>
-            </a:r>
-            <a:r>
-              <a:rPr lang="en-US" sz="1400" dirty="0">
-                <a:ea typeface="Calibri"/>
-                <a:cs typeface="Calibri"/>
-              </a:rPr>
-              <a:t>, </a:t>
-            </a:r>
-            <a:r>
-              <a:rPr lang="en-US" sz="1400" dirty="0" err="1">
-                <a:ea typeface="Calibri"/>
-                <a:cs typeface="Calibri"/>
-              </a:rPr>
-              <a:t>puede</a:t>
-            </a:r>
-            <a:r>
-              <a:rPr lang="en-US" sz="1400" dirty="0">
-                <a:ea typeface="Calibri"/>
-                <a:cs typeface="Calibri"/>
-              </a:rPr>
-              <a:t> </a:t>
-            </a:r>
-            <a:r>
-              <a:rPr lang="en-US" sz="1400" dirty="0" err="1">
-                <a:ea typeface="Calibri"/>
-                <a:cs typeface="Calibri"/>
-              </a:rPr>
-              <a:t>deberse</a:t>
-            </a:r>
-            <a:r>
-              <a:rPr lang="en-US" sz="1400" dirty="0">
-                <a:ea typeface="Calibri"/>
-                <a:cs typeface="Calibri"/>
-              </a:rPr>
-              <a:t> a </a:t>
-            </a:r>
-            <a:r>
-              <a:rPr lang="en-US" sz="1400" dirty="0" err="1">
-                <a:ea typeface="Calibri"/>
-                <a:cs typeface="Calibri"/>
-              </a:rPr>
-              <a:t>pequeños</a:t>
-            </a:r>
-            <a:r>
-              <a:rPr lang="en-US" sz="1400" dirty="0">
-                <a:ea typeface="Calibri"/>
-                <a:cs typeface="Calibri"/>
-              </a:rPr>
-              <a:t> </a:t>
-            </a:r>
-            <a:r>
-              <a:rPr lang="en-US" sz="1400" dirty="0" err="1">
-                <a:ea typeface="Calibri"/>
-                <a:cs typeface="Calibri"/>
-              </a:rPr>
-              <a:t>fallos</a:t>
-            </a:r>
-            <a:r>
-              <a:rPr lang="en-US" sz="1400" dirty="0">
-                <a:ea typeface="Calibri"/>
-                <a:cs typeface="Calibri"/>
-              </a:rPr>
-              <a:t> </a:t>
-            </a:r>
-            <a:r>
-              <a:rPr lang="en-US" sz="1400" dirty="0" err="1">
-                <a:ea typeface="Calibri"/>
-                <a:cs typeface="Calibri"/>
-              </a:rPr>
-              <a:t>en</a:t>
-            </a:r>
-            <a:r>
-              <a:rPr lang="en-US" sz="1400" dirty="0">
-                <a:ea typeface="Calibri"/>
-                <a:cs typeface="Calibri"/>
-              </a:rPr>
-              <a:t> la </a:t>
-            </a:r>
-            <a:r>
-              <a:rPr lang="en-US" sz="1400" dirty="0" err="1">
-                <a:ea typeface="Calibri"/>
-                <a:cs typeface="Calibri"/>
-              </a:rPr>
-              <a:t>matriz</a:t>
-            </a:r>
-            <a:r>
-              <a:rPr lang="en-US" sz="1400" dirty="0">
-                <a:ea typeface="Calibri"/>
-                <a:cs typeface="Calibri"/>
-              </a:rPr>
-              <a:t> del </a:t>
-            </a:r>
-            <a:r>
-              <a:rPr lang="en-US" sz="1400" dirty="0" err="1">
-                <a:ea typeface="Calibri"/>
-                <a:cs typeface="Calibri"/>
-              </a:rPr>
-              <a:t>modelo</a:t>
-            </a:r>
-            <a:r>
-              <a:rPr lang="en-US" sz="1400" dirty="0">
-                <a:ea typeface="Calibri"/>
-                <a:cs typeface="Calibri"/>
-              </a:rPr>
-              <a:t>.</a:t>
-            </a:r>
-          </a:p>
-          <a:p>
-            <a:pPr algn="just"/>
-            <a:endParaRPr lang="en-US" sz="1200" dirty="0">
+            <a:endParaRPr lang="en-US" sz="1200">
               <a:ea typeface="Calibri"/>
               <a:cs typeface="Calibri"/>
             </a:endParaRPr>
@@ -8981,10 +8718,10 @@
       </p:sp>
       <p:pic>
         <p:nvPicPr>
-          <p:cNvPr id="4" name="Picture 3">
+          <p:cNvPr id="6" name="Picture 5">
             <a:extLst>
               <a:ext uri="{FF2B5EF4-FFF2-40B4-BE49-F238E27FC236}">
-                <a16:creationId xmlns:a16="http://schemas.microsoft.com/office/drawing/2014/main" id="{26BE0CFB-A90C-4677-658F-EE0D04F6CA35}"/>
+                <a16:creationId xmlns:a16="http://schemas.microsoft.com/office/drawing/2014/main" id="{C79A200F-9B3D-E2DB-386A-01CCFB35496F}"/>
               </a:ext>
             </a:extLst>
           </p:cNvPr>
@@ -9001,8 +8738,8 @@
         </p:blipFill>
         <p:spPr>
           <a:xfrm>
-            <a:off x="1027325" y="1564105"/>
-            <a:ext cx="3783532" cy="3013624"/>
+            <a:off x="1183703" y="1484194"/>
+            <a:ext cx="4024294" cy="3156045"/>
           </a:xfrm>
           <a:prstGeom prst="rect">
             <a:avLst/>
@@ -9011,10 +8748,10 @@
       </p:pic>
       <p:pic>
         <p:nvPicPr>
-          <p:cNvPr id="5" name="Picture 4">
+          <p:cNvPr id="9" name="Picture 8">
             <a:extLst>
               <a:ext uri="{FF2B5EF4-FFF2-40B4-BE49-F238E27FC236}">
-                <a16:creationId xmlns:a16="http://schemas.microsoft.com/office/drawing/2014/main" id="{48B7AA01-87D9-7BAB-0147-CB7BD5B308B4}"/>
+                <a16:creationId xmlns:a16="http://schemas.microsoft.com/office/drawing/2014/main" id="{DB9C4254-6A89-2394-BC64-722A4F4DFEA6}"/>
               </a:ext>
             </a:extLst>
           </p:cNvPr>
@@ -9031,8 +8768,8 @@
         </p:blipFill>
         <p:spPr>
           <a:xfrm>
-            <a:off x="6181581" y="1564105"/>
-            <a:ext cx="3971138" cy="3076647"/>
+            <a:off x="6488618" y="1415953"/>
+            <a:ext cx="4224627" cy="3275465"/>
           </a:xfrm>
           <a:prstGeom prst="rect">
             <a:avLst/>
